--- a/outputs/final_project/NHTS_LLM_Event_Adaptation_Presentation.pptx
+++ b/outputs/final_project/NHTS_LLM_Event_Adaptation_Presentation.pptx
@@ -3240,7 +3240,7 @@
               </a:defRPr>
             </a:pPr>
             <a:r>
-              <a:t>-42.8%</a:t>
+              <a:t>-42.3%</a:t>
             </a:r>
           </a:p>
           <a:p>
@@ -3253,7 +3253,7 @@
               </a:defRPr>
             </a:pPr>
             <a:r>
-              <a:t>vs historical predictor</a:t>
+              <a:t>primary gated rule</a:t>
             </a:r>
           </a:p>
         </p:txBody>
@@ -3321,7 +3321,7 @@
               </a:defRPr>
             </a:pPr>
             <a:r>
-              <a:t>-85.0%</a:t>
+              <a:t>-99.4%</a:t>
             </a:r>
           </a:p>
           <a:p>
@@ -3334,7 +3334,7 @@
               </a:defRPr>
             </a:pPr>
             <a:r>
-              <a:t>absolute bias reduction</a:t>
+              <a:t>gated absolute bias reduction</a:t>
             </a:r>
           </a:p>
         </p:txBody>
@@ -3638,7 +3638,23 @@
               </a:defRPr>
             </a:pPr>
             <a:r>
-              <a:t>Accuracy: weighted MAE reduction 42.8%; weighted RMSE reduction 31.2%.</a:t>
+              <a:t>Accuracy: primary weighted MAE reduction 42.3%; best-MAE sensitivity reduction 42.8%.</a:t>
+            </a:r>
+          </a:p>
+          <a:p>
+            <a:pPr>
+              <a:spcAft>
+                <a:spcPts val="800"/>
+              </a:spcAft>
+              <a:defRPr sz="2300">
+                <a:solidFill>
+                  <a:srgbClr val="1E293B"/>
+                </a:solidFill>
+                <a:latin typeface="Microsoft YaHei"/>
+              </a:defRPr>
+            </a:pPr>
+            <a:r>
+              <a:t>Bias: primary gated correction reduces absolute weighted bias by 99.4%.</a:t>
             </a:r>
           </a:p>
           <a:p>
@@ -4612,7 +4628,7 @@
               </a:defRPr>
             </a:pPr>
             <a:r>
-              <a:t>LLM trip-suppression prior sharply reduces household prediction error</a:t>
+              <a:t>Fixed gated LLM event prior sharply reduces household prediction error</a:t>
             </a:r>
           </a:p>
         </p:txBody>

--- a/outputs/final_project/NHTS_LLM_Event_Adaptation_Presentation.pptx
+++ b/outputs/final_project/NHTS_LLM_Event_Adaptation_Presentation.pptx
@@ -3638,7 +3638,7 @@
               </a:defRPr>
             </a:pPr>
             <a:r>
-              <a:t>Accuracy: primary weighted MAE reduction 42.3%; best-MAE sensitivity reduction 42.8%.</a:t>
+              <a:t>Accuracy: primary weighted MAE reduction 42.3%; near-zero weighted bias.</a:t>
             </a:r>
           </a:p>
           <a:p>
@@ -4842,7 +4842,7 @@
         <p:spPr>
           <a:xfrm>
             <a:off x="822960" y="1143000"/>
-            <a:ext cx="10515600" cy="4266556"/>
+            <a:ext cx="10515600" cy="4241512"/>
           </a:xfrm>
           <a:prstGeom prst="rect">
             <a:avLst/>
@@ -5252,7 +5252,7 @@
               </a:defRPr>
             </a:pPr>
             <a:r>
-              <a:t>Random controls are weaker than LLM trip suppression.</a:t>
+              <a:t>Random controls are weaker than structured event adaptation.</a:t>
             </a:r>
           </a:p>
           <a:p>

--- a/outputs/final_project/NHTS_LLM_Event_Adaptation_Presentation.pptx
+++ b/outputs/final_project/NHTS_LLM_Event_Adaptation_Presentation.pptx
@@ -3876,7 +3876,7 @@
         <p:spPr>
           <a:xfrm>
             <a:off x="5806440" y="1234440"/>
-            <a:ext cx="5806440" cy="2871636"/>
+            <a:ext cx="5806440" cy="2871663"/>
           </a:xfrm>
           <a:prstGeom prst="rect">
             <a:avLst/>
@@ -4528,7 +4528,7 @@
         <p:spPr>
           <a:xfrm>
             <a:off x="5715000" y="1188720"/>
-            <a:ext cx="5806440" cy="3058058"/>
+            <a:ext cx="5806440" cy="3050237"/>
           </a:xfrm>
           <a:prstGeom prst="rect">
             <a:avLst/>
@@ -4685,7 +4685,7 @@
         <p:spPr>
           <a:xfrm>
             <a:off x="731520" y="1143000"/>
-            <a:ext cx="10881360" cy="5381492"/>
+            <a:ext cx="10881360" cy="5381542"/>
           </a:xfrm>
           <a:prstGeom prst="rect">
             <a:avLst/>
@@ -4842,7 +4842,7 @@
         <p:spPr>
           <a:xfrm>
             <a:off x="822960" y="1143000"/>
-            <a:ext cx="10515600" cy="4241512"/>
+            <a:ext cx="10515600" cy="4238813"/>
           </a:xfrm>
           <a:prstGeom prst="rect">
             <a:avLst/>
@@ -4999,7 +4999,7 @@
         <p:spPr>
           <a:xfrm>
             <a:off x="777240" y="1143000"/>
-            <a:ext cx="10698480" cy="5236624"/>
+            <a:ext cx="10698480" cy="5229742"/>
           </a:xfrm>
           <a:prstGeom prst="rect">
             <a:avLst/>
@@ -5040,7 +5040,7 @@
               </a:defRPr>
             </a:pPr>
             <a:r>
-              <a:t>Gated correction: MAE 2.47; 54.5% within ±2 trips; 71.2% within ±3 trips.</a:t>
+              <a:t>Gated correction: MAE 2.48; 54.0% within ±2 trips; 71.1% within ±3 trips.</a:t>
             </a:r>
           </a:p>
         </p:txBody>
@@ -5195,7 +5195,7 @@
         <p:spPr>
           <a:xfrm>
             <a:off x="777240" y="1143000"/>
-            <a:ext cx="6400800" cy="3191078"/>
+            <a:ext cx="6400800" cy="3192635"/>
           </a:xfrm>
           <a:prstGeom prst="rect">
             <a:avLst/>
